--- a/docs/Specz.pptx
+++ b/docs/Specz.pptx
@@ -7980,6 +7980,96 @@
           </a:p>
         </p:txBody>
       </p:sp>
+      <p:pic>
+        <p:nvPicPr>
+          <p:cNvPr id="5" name="Picture 4">
+            <a:extLst>
+              <a:ext uri="{FF2B5EF4-FFF2-40B4-BE49-F238E27FC236}">
+                <a16:creationId xmlns:a16="http://schemas.microsoft.com/office/drawing/2014/main" id="{1E2AAB55-BDB7-9E92-FD82-B6B21550F46E}"/>
+              </a:ext>
+            </a:extLst>
+          </p:cNvPr>
+          <p:cNvPicPr>
+            <a:picLocks noChangeAspect="1"/>
+          </p:cNvPicPr>
+          <p:nvPr/>
+        </p:nvPicPr>
+        <p:blipFill>
+          <a:blip r:embed="rId3"/>
+          <a:stretch>
+            <a:fillRect/>
+          </a:stretch>
+        </p:blipFill>
+        <p:spPr>
+          <a:xfrm>
+            <a:off x="4590288" y="1417320"/>
+            <a:ext cx="3364992" cy="5276519"/>
+          </a:xfrm>
+          <a:prstGeom prst="rect">
+            <a:avLst/>
+          </a:prstGeom>
+        </p:spPr>
+      </p:pic>
+      <p:pic>
+        <p:nvPicPr>
+          <p:cNvPr id="7" name="Picture 6">
+            <a:extLst>
+              <a:ext uri="{FF2B5EF4-FFF2-40B4-BE49-F238E27FC236}">
+                <a16:creationId xmlns:a16="http://schemas.microsoft.com/office/drawing/2014/main" id="{65A1A8E7-3A15-5A2C-EFD8-36922F7BDFF7}"/>
+              </a:ext>
+            </a:extLst>
+          </p:cNvPr>
+          <p:cNvPicPr>
+            <a:picLocks noChangeAspect="1"/>
+          </p:cNvPicPr>
+          <p:nvPr/>
+        </p:nvPicPr>
+        <p:blipFill>
+          <a:blip r:embed="rId4"/>
+          <a:stretch>
+            <a:fillRect/>
+          </a:stretch>
+        </p:blipFill>
+        <p:spPr>
+          <a:xfrm>
+            <a:off x="644510" y="1417320"/>
+            <a:ext cx="3367609" cy="5029200"/>
+          </a:xfrm>
+          <a:prstGeom prst="rect">
+            <a:avLst/>
+          </a:prstGeom>
+        </p:spPr>
+      </p:pic>
+      <p:pic>
+        <p:nvPicPr>
+          <p:cNvPr id="9" name="Picture 8">
+            <a:extLst>
+              <a:ext uri="{FF2B5EF4-FFF2-40B4-BE49-F238E27FC236}">
+                <a16:creationId xmlns:a16="http://schemas.microsoft.com/office/drawing/2014/main" id="{0847A83C-A52F-BF06-5676-24A5990F6869}"/>
+              </a:ext>
+            </a:extLst>
+          </p:cNvPr>
+          <p:cNvPicPr>
+            <a:picLocks noChangeAspect="1"/>
+          </p:cNvPicPr>
+          <p:nvPr/>
+        </p:nvPicPr>
+        <p:blipFill>
+          <a:blip r:embed="rId5"/>
+          <a:stretch>
+            <a:fillRect/>
+          </a:stretch>
+        </p:blipFill>
+        <p:spPr>
+          <a:xfrm>
+            <a:off x="8554415" y="1417320"/>
+            <a:ext cx="3364992" cy="2946594"/>
+          </a:xfrm>
+          <a:prstGeom prst="rect">
+            <a:avLst/>
+          </a:prstGeom>
+        </p:spPr>
+      </p:pic>
     </p:spTree>
   </p:cSld>
   <p:clrMapOvr>
